--- a/output/proposal_broadlink_20260430.pptx
+++ b/output/proposal_broadlink_20260430.pptx
@@ -3593,7 +3593,7 @@
                 </a:solidFill>
                 <a:latin typeface="Noto Sans JP"/>
               </a:rPr>
-              <a:t>2026年4月</a:t>
+              <a:t>2026年4月30日</a:t>
             </a:r>
           </a:p>
         </p:txBody>
@@ -4025,7 +4025,7 @@
         <p:spPr>
           <a:xfrm>
             <a:off x="457200" y="1417320"/>
-            <a:ext cx="11274552" cy="1223010"/>
+            <a:ext cx="11274552" cy="1661160"/>
           </a:xfrm>
           <a:prstGeom prst="roundRect">
             <a:avLst>
@@ -4070,7 +4070,7 @@
         <p:spPr>
           <a:xfrm>
             <a:off x="457200" y="1417320"/>
-            <a:ext cx="54864" cy="1223010"/>
+            <a:ext cx="54864" cy="1661160"/>
           </a:xfrm>
           <a:prstGeom prst="rect">
             <a:avLst/>
@@ -4112,7 +4112,7 @@
         </p:nvSpPr>
         <p:spPr>
           <a:xfrm>
-            <a:off x="585216" y="1791081"/>
+            <a:off x="585216" y="2010156"/>
             <a:ext cx="475488" cy="475488"/>
           </a:xfrm>
           <a:prstGeom prst="ellipse">
@@ -4165,7 +4165,7 @@
         <p:spPr>
           <a:xfrm>
             <a:off x="1325880" y="1508760"/>
-            <a:ext cx="3931920" cy="1040130"/>
+            <a:ext cx="3931920" cy="1478280"/>
           </a:xfrm>
           <a:prstGeom prst="roundRect">
             <a:avLst>
@@ -4226,7 +4226,7 @@
         <p:spPr>
           <a:xfrm>
             <a:off x="1325880" y="1508760"/>
-            <a:ext cx="45720" cy="1040130"/>
+            <a:ext cx="45720" cy="1478280"/>
           </a:xfrm>
           <a:prstGeom prst="rect">
             <a:avLst/>
@@ -4269,7 +4269,7 @@
         <p:spPr>
           <a:xfrm>
             <a:off x="5486400" y="1417320"/>
-            <a:ext cx="6153912" cy="1223010"/>
+            <a:ext cx="6153912" cy="1661160"/>
           </a:xfrm>
           <a:prstGeom prst="rect">
             <a:avLst/>
@@ -4325,8 +4325,8 @@
         </p:nvSpPr>
         <p:spPr>
           <a:xfrm>
-            <a:off x="457200" y="2731770"/>
-            <a:ext cx="11274552" cy="1223010"/>
+            <a:off x="457200" y="3169920"/>
+            <a:ext cx="11274552" cy="1661160"/>
           </a:xfrm>
           <a:prstGeom prst="roundRect">
             <a:avLst>
@@ -4370,8 +4370,8 @@
         </p:nvSpPr>
         <p:spPr>
           <a:xfrm>
-            <a:off x="457200" y="2731770"/>
-            <a:ext cx="54864" cy="1223010"/>
+            <a:off x="457200" y="3169920"/>
+            <a:ext cx="54864" cy="1661160"/>
           </a:xfrm>
           <a:prstGeom prst="rect">
             <a:avLst/>
@@ -4413,7 +4413,7 @@
         </p:nvSpPr>
         <p:spPr>
           <a:xfrm>
-            <a:off x="585216" y="3105531"/>
+            <a:off x="585216" y="3762756"/>
             <a:ext cx="475488" cy="475488"/>
           </a:xfrm>
           <a:prstGeom prst="ellipse">
@@ -4465,8 +4465,8 @@
         </p:nvSpPr>
         <p:spPr>
           <a:xfrm>
-            <a:off x="1325880" y="2823210"/>
-            <a:ext cx="3931920" cy="1040130"/>
+            <a:off x="1325880" y="3261360"/>
+            <a:ext cx="3931920" cy="1478280"/>
           </a:xfrm>
           <a:prstGeom prst="roundRect">
             <a:avLst>
@@ -4526,8 +4526,8 @@
         </p:nvSpPr>
         <p:spPr>
           <a:xfrm>
-            <a:off x="1325880" y="2823210"/>
-            <a:ext cx="45720" cy="1040130"/>
+            <a:off x="1325880" y="3261360"/>
+            <a:ext cx="45720" cy="1478280"/>
           </a:xfrm>
           <a:prstGeom prst="rect">
             <a:avLst/>
@@ -4569,8 +4569,8 @@
         </p:nvSpPr>
         <p:spPr>
           <a:xfrm>
-            <a:off x="5486400" y="2731770"/>
-            <a:ext cx="6153912" cy="1223010"/>
+            <a:off x="5486400" y="3169920"/>
+            <a:ext cx="6153912" cy="1661160"/>
           </a:xfrm>
           <a:prstGeom prst="rect">
             <a:avLst/>
@@ -4626,8 +4626,8 @@
         </p:nvSpPr>
         <p:spPr>
           <a:xfrm>
-            <a:off x="457200" y="4046220"/>
-            <a:ext cx="11274552" cy="1223010"/>
+            <a:off x="457200" y="4922520"/>
+            <a:ext cx="11274552" cy="1661160"/>
           </a:xfrm>
           <a:prstGeom prst="roundRect">
             <a:avLst>
@@ -4671,8 +4671,8 @@
         </p:nvSpPr>
         <p:spPr>
           <a:xfrm>
-            <a:off x="457200" y="4046220"/>
-            <a:ext cx="54864" cy="1223010"/>
+            <a:off x="457200" y="4922520"/>
+            <a:ext cx="54864" cy="1661160"/>
           </a:xfrm>
           <a:prstGeom prst="rect">
             <a:avLst/>
@@ -4714,7 +4714,7 @@
         </p:nvSpPr>
         <p:spPr>
           <a:xfrm>
-            <a:off x="585216" y="4419981"/>
+            <a:off x="585216" y="5515356"/>
             <a:ext cx="475488" cy="475488"/>
           </a:xfrm>
           <a:prstGeom prst="ellipse">
@@ -4766,8 +4766,8 @@
         </p:nvSpPr>
         <p:spPr>
           <a:xfrm>
-            <a:off x="1325880" y="4137660"/>
-            <a:ext cx="3931920" cy="1040130"/>
+            <a:off x="1325880" y="5013960"/>
+            <a:ext cx="3931920" cy="1478280"/>
           </a:xfrm>
           <a:prstGeom prst="roundRect">
             <a:avLst>
@@ -4827,8 +4827,8 @@
         </p:nvSpPr>
         <p:spPr>
           <a:xfrm>
-            <a:off x="1325880" y="4137660"/>
-            <a:ext cx="45720" cy="1040130"/>
+            <a:off x="1325880" y="5013960"/>
+            <a:ext cx="45720" cy="1478280"/>
           </a:xfrm>
           <a:prstGeom prst="rect">
             <a:avLst/>
@@ -4870,8 +4870,8 @@
         </p:nvSpPr>
         <p:spPr>
           <a:xfrm>
-            <a:off x="5486400" y="4046220"/>
-            <a:ext cx="6153912" cy="1223010"/>
+            <a:off x="5486400" y="4922520"/>
+            <a:ext cx="6153912" cy="1661160"/>
           </a:xfrm>
           <a:prstGeom prst="rect">
             <a:avLst/>
@@ -4915,307 +4915,6 @@
                 <a:latin typeface="Noto Sans JP"/>
               </a:rPr>
               <a:t>セキュリティ要素は事例ベースで凝縮し、研修全体の20%以内に収める</a:t>
-            </a:r>
-          </a:p>
-        </p:txBody>
-      </p:sp>
-      <p:sp>
-        <p:nvSpPr>
-          <p:cNvPr id="27" name="Rounded Rectangle 26"/>
-          <p:cNvSpPr/>
-          <p:nvPr/>
-        </p:nvSpPr>
-        <p:spPr>
-          <a:xfrm>
-            <a:off x="457200" y="5360670"/>
-            <a:ext cx="11274552" cy="1223010"/>
-          </a:xfrm>
-          <a:prstGeom prst="roundRect">
-            <a:avLst>
-              <a:gd name="adj" fmla="val 3000"/>
-            </a:avLst>
-          </a:prstGeom>
-          <a:solidFill>
-            <a:srgbClr val="FFFFFF"/>
-          </a:solidFill>
-          <a:ln>
-            <a:noFill/>
-          </a:ln>
-        </p:spPr>
-        <p:style>
-          <a:lnRef idx="1">
-            <a:schemeClr val="accent1"/>
-          </a:lnRef>
-          <a:fillRef idx="3">
-            <a:schemeClr val="accent1"/>
-          </a:fillRef>
-          <a:effectRef idx="2">
-            <a:schemeClr val="accent1"/>
-          </a:effectRef>
-          <a:fontRef idx="minor">
-            <a:schemeClr val="lt1"/>
-          </a:fontRef>
-        </p:style>
-        <p:txBody>
-          <a:bodyPr rtlCol="0" anchor="ctr"/>
-          <a:lstStyle/>
-          <a:p>
-            <a:pPr algn="ctr"/>
-          </a:p>
-        </p:txBody>
-      </p:sp>
-      <p:sp>
-        <p:nvSpPr>
-          <p:cNvPr id="28" name="Rectangle 27"/>
-          <p:cNvSpPr/>
-          <p:nvPr/>
-        </p:nvSpPr>
-        <p:spPr>
-          <a:xfrm>
-            <a:off x="457200" y="5360670"/>
-            <a:ext cx="54864" cy="1223010"/>
-          </a:xfrm>
-          <a:prstGeom prst="rect">
-            <a:avLst/>
-          </a:prstGeom>
-          <a:solidFill>
-            <a:srgbClr val="42A4AF"/>
-          </a:solidFill>
-          <a:ln>
-            <a:noFill/>
-          </a:ln>
-        </p:spPr>
-        <p:style>
-          <a:lnRef idx="1">
-            <a:schemeClr val="accent1"/>
-          </a:lnRef>
-          <a:fillRef idx="3">
-            <a:schemeClr val="accent1"/>
-          </a:fillRef>
-          <a:effectRef idx="2">
-            <a:schemeClr val="accent1"/>
-          </a:effectRef>
-          <a:fontRef idx="minor">
-            <a:schemeClr val="lt1"/>
-          </a:fontRef>
-        </p:style>
-        <p:txBody>
-          <a:bodyPr rtlCol="0" anchor="ctr"/>
-          <a:lstStyle/>
-          <a:p>
-            <a:pPr algn="ctr"/>
-          </a:p>
-        </p:txBody>
-      </p:sp>
-      <p:sp>
-        <p:nvSpPr>
-          <p:cNvPr id="29" name="Oval 28"/>
-          <p:cNvSpPr/>
-          <p:nvPr/>
-        </p:nvSpPr>
-        <p:spPr>
-          <a:xfrm>
-            <a:off x="585216" y="5734431"/>
-            <a:ext cx="475488" cy="475488"/>
-          </a:xfrm>
-          <a:prstGeom prst="ellipse">
-            <a:avLst/>
-          </a:prstGeom>
-          <a:solidFill>
-            <a:srgbClr val="42A4AF"/>
-          </a:solidFill>
-          <a:ln>
-            <a:noFill/>
-          </a:ln>
-        </p:spPr>
-        <p:style>
-          <a:lnRef idx="1">
-            <a:schemeClr val="accent1"/>
-          </a:lnRef>
-          <a:fillRef idx="3">
-            <a:schemeClr val="accent1"/>
-          </a:fillRef>
-          <a:effectRef idx="2">
-            <a:schemeClr val="accent1"/>
-          </a:effectRef>
-          <a:fontRef idx="minor">
-            <a:schemeClr val="lt1"/>
-          </a:fontRef>
-        </p:style>
-        <p:txBody>
-          <a:bodyPr rtlCol="0" anchor="ctr" wrap="none"/>
-          <a:lstStyle/>
-          <a:p>
-            <a:pPr algn="ctr"/>
-            <a:r>
-              <a:rPr sz="800" b="1">
-                <a:solidFill>
-                  <a:srgbClr val="FFFFFF"/>
-                </a:solidFill>
-                <a:latin typeface="Noto Sans JP"/>
-              </a:rPr>
-              <a:t>4</a:t>
-            </a:r>
-          </a:p>
-        </p:txBody>
-      </p:sp>
-      <p:sp>
-        <p:nvSpPr>
-          <p:cNvPr id="30" name="Rounded Rectangle 29"/>
-          <p:cNvSpPr/>
-          <p:nvPr/>
-        </p:nvSpPr>
-        <p:spPr>
-          <a:xfrm>
-            <a:off x="1325880" y="5452110"/>
-            <a:ext cx="3931920" cy="1040130"/>
-          </a:xfrm>
-          <a:prstGeom prst="roundRect">
-            <a:avLst>
-              <a:gd name="adj" fmla="val 2000"/>
-            </a:avLst>
-          </a:prstGeom>
-          <a:solidFill>
-            <a:srgbClr val="EAF6F7"/>
-          </a:solidFill>
-          <a:ln>
-            <a:noFill/>
-          </a:ln>
-        </p:spPr>
-        <p:style>
-          <a:lnRef idx="1">
-            <a:schemeClr val="accent1"/>
-          </a:lnRef>
-          <a:fillRef idx="3">
-            <a:schemeClr val="accent1"/>
-          </a:fillRef>
-          <a:effectRef idx="2">
-            <a:schemeClr val="accent1"/>
-          </a:effectRef>
-          <a:fontRef idx="minor">
-            <a:schemeClr val="lt1"/>
-          </a:fontRef>
-        </p:style>
-        <p:txBody>
-          <a:bodyPr rtlCol="0" anchor="ctr" wrap="square" lIns="109728" rIns="73152" tIns="54864" bIns="54864"/>
-          <a:lstStyle/>
-          <a:p>
-            <a:pPr algn="l">
-              <a:spcBef>
-                <a:spcPts val="100"/>
-              </a:spcBef>
-              <a:spcAft>
-                <a:spcPts val="100"/>
-              </a:spcAft>
-            </a:pPr>
-            <a:r>
-              <a:rPr sz="1600" b="1">
-                <a:solidFill>
-                  <a:srgbClr val="42A4AF"/>
-                </a:solidFill>
-                <a:latin typeface="Noto Sans JP"/>
-              </a:rPr>
-              <a:t>金額据え置き</a:t>
-            </a:r>
-          </a:p>
-        </p:txBody>
-      </p:sp>
-      <p:sp>
-        <p:nvSpPr>
-          <p:cNvPr id="31" name="Rectangle 30"/>
-          <p:cNvSpPr/>
-          <p:nvPr/>
-        </p:nvSpPr>
-        <p:spPr>
-          <a:xfrm>
-            <a:off x="1325880" y="5452110"/>
-            <a:ext cx="45720" cy="1040130"/>
-          </a:xfrm>
-          <a:prstGeom prst="rect">
-            <a:avLst/>
-          </a:prstGeom>
-          <a:solidFill>
-            <a:srgbClr val="42A4AF"/>
-          </a:solidFill>
-          <a:ln>
-            <a:noFill/>
-          </a:ln>
-        </p:spPr>
-        <p:style>
-          <a:lnRef idx="1">
-            <a:schemeClr val="accent1"/>
-          </a:lnRef>
-          <a:fillRef idx="3">
-            <a:schemeClr val="accent1"/>
-          </a:fillRef>
-          <a:effectRef idx="2">
-            <a:schemeClr val="accent1"/>
-          </a:effectRef>
-          <a:fontRef idx="minor">
-            <a:schemeClr val="lt1"/>
-          </a:fontRef>
-        </p:style>
-        <p:txBody>
-          <a:bodyPr rtlCol="0" anchor="ctr"/>
-          <a:lstStyle/>
-          <a:p>
-            <a:pPr algn="ctr"/>
-          </a:p>
-        </p:txBody>
-      </p:sp>
-      <p:sp>
-        <p:nvSpPr>
-          <p:cNvPr id="32" name="Rectangle 31"/>
-          <p:cNvSpPr/>
-          <p:nvPr/>
-        </p:nvSpPr>
-        <p:spPr>
-          <a:xfrm>
-            <a:off x="5486400" y="5360670"/>
-            <a:ext cx="6153912" cy="1223010"/>
-          </a:xfrm>
-          <a:prstGeom prst="rect">
-            <a:avLst/>
-          </a:prstGeom>
-          <a:noFill/>
-          <a:ln>
-            <a:noFill/>
-          </a:ln>
-        </p:spPr>
-        <p:style>
-          <a:lnRef idx="1">
-            <a:schemeClr val="accent1"/>
-          </a:lnRef>
-          <a:fillRef idx="3">
-            <a:schemeClr val="accent1"/>
-          </a:fillRef>
-          <a:effectRef idx="2">
-            <a:schemeClr val="accent1"/>
-          </a:effectRef>
-          <a:fontRef idx="minor">
-            <a:schemeClr val="lt1"/>
-          </a:fontRef>
-        </p:style>
-        <p:txBody>
-          <a:bodyPr rtlCol="0" anchor="ctr" wrap="square" rIns="73152" tIns="54864" bIns="54864"/>
-          <a:lstStyle/>
-          <a:p>
-            <a:pPr algn="l">
-              <a:spcBef>
-                <a:spcPts val="100"/>
-              </a:spcBef>
-              <a:spcAft>
-                <a:spcPts val="100"/>
-              </a:spcAft>
-            </a:pPr>
-            <a:r>
-              <a:rPr sz="1300" b="0">
-                <a:solidFill>
-                  <a:srgbClr val="1F2937"/>
-                </a:solidFill>
-                <a:latin typeface="Noto Sans JP"/>
-              </a:rPr>
-              <a:t>税込286,000円（税抜260,000円）／前年同額</a:t>
             </a:r>
           </a:p>
         </p:txBody>
@@ -6247,7 +5946,7 @@
                 </a:solidFill>
                 <a:latin typeface="Noto Sans JP"/>
               </a:rPr>
-              <a:t>体験</a:t>
+              <a:t>ゲーム性</a:t>
             </a:r>
           </a:p>
         </p:txBody>
@@ -6304,7 +6003,7 @@
                 </a:solidFill>
                 <a:latin typeface="Noto Sans JP"/>
               </a:rPr>
-              <a:t>第3章でラッキーパズル（2人1組で言葉だけで形を伝えるゲーム）を実施</a:t>
+              <a:t>研修にゲーム性を取り入れ、参加者が能動的に手と頭を動かす設計にする</a:t>
             </a:r>
           </a:p>
         </p:txBody>
@@ -6453,7 +6152,7 @@
                 </a:solidFill>
                 <a:latin typeface="Noto Sans JP"/>
               </a:rPr>
-              <a:t>伏線回収</a:t>
+              <a:t>体感→腹落ち</a:t>
             </a:r>
           </a:p>
         </p:txBody>
@@ -6510,7 +6209,7 @@
                 </a:solidFill>
                 <a:latin typeface="Noto Sans JP"/>
               </a:rPr>
-              <a:t>ゲーム中は目的を伏せ、後半で「実はこれがAIへの指示の出し方」と種明かし</a:t>
+              <a:t>座学ではなく"体感"を起点にすることで、概念がそのまま身体に染み込む</a:t>
             </a:r>
           </a:p>
         </p:txBody>
@@ -6659,7 +6358,7 @@
                 </a:solidFill>
                 <a:latin typeface="Noto Sans JP"/>
               </a:rPr>
-              <a:t>腹落ち</a:t>
+              <a:t>実戦性</a:t>
             </a:r>
           </a:p>
         </p:txBody>
@@ -6716,7 +6415,7 @@
                 </a:solidFill>
                 <a:latin typeface="Noto Sans JP"/>
               </a:rPr>
-              <a:t>「ガチガチの指示書はいらない、会話するように渡す」をコンテキストエンジとして体得</a:t>
+              <a:t>ハンズオン50分で、研修終了後すぐに業務で使える状態まで持っていく</a:t>
             </a:r>
           </a:p>
         </p:txBody>
@@ -6865,7 +6564,7 @@
                 </a:solidFill>
                 <a:latin typeface="Noto Sans JP"/>
               </a:rPr>
-              <a:t>進化</a:t>
+              <a:t>飽きさせない</a:t>
             </a:r>
           </a:p>
         </p:txBody>
@@ -6922,7 +6621,7 @@
                 </a:solidFill>
                 <a:latin typeface="Noto Sans JP"/>
               </a:rPr>
-              <a:t>最新概念（コンテキストエンジ）を、難しい言葉ではなく体験で習得させる構成</a:t>
+              <a:t>8年目のISMS研修だからこそ、毎回違う"驚き"を仕込んだ構成にする</a:t>
             </a:r>
           </a:p>
         </p:txBody>

--- a/output/proposal_broadlink_20260430.pptx
+++ b/output/proposal_broadlink_20260430.pptx
@@ -19821,7 +19821,7 @@
                 </a:solidFill>
                 <a:latin typeface="Noto Sans JP"/>
               </a:rPr>
-              <a:t>東京都渋谷区</a:t>
+              <a:t>東京都新宿区</a:t>
             </a:r>
           </a:p>
         </p:txBody>
@@ -20057,7 +20057,7 @@
                 </a:solidFill>
                 <a:latin typeface="Noto Sans JP"/>
               </a:rPr>
-              <a:t>約20名</a:t>
+              <a:t>約150名（業務委託・インターン生含む）</a:t>
             </a:r>
           </a:p>
         </p:txBody>

--- a/output/proposal_broadlink_20260430.pptx
+++ b/output/proposal_broadlink_20260430.pptx
@@ -20245,7 +20245,7 @@
             <a:avLst/>
           </a:prstGeom>
           <a:solidFill>
-            <a:srgbClr val="42A4AF"/>
+            <a:srgbClr val="1E90FF"/>
           </a:solidFill>
           <a:ln>
             <a:noFill/>
@@ -20447,7 +20447,7 @@
             <a:avLst/>
           </a:prstGeom>
           <a:solidFill>
-            <a:srgbClr val="3B82F6"/>
+            <a:srgbClr val="FF6600"/>
           </a:solidFill>
           <a:ln>
             <a:noFill/>
@@ -20649,7 +20649,7 @@
             <a:avLst/>
           </a:prstGeom>
           <a:solidFill>
-            <a:srgbClr val="16A34A"/>
+            <a:srgbClr val="10BF16"/>
           </a:solidFill>
           <a:ln>
             <a:noFill/>
@@ -20851,7 +20851,7 @@
             <a:avLst/>
           </a:prstGeom>
           <a:solidFill>
-            <a:srgbClr val="D97706"/>
+            <a:srgbClr val="7C3AED"/>
           </a:solidFill>
           <a:ln>
             <a:noFill/>
